--- a/assets/dambbukharu/pitch-deck-seed-v1.1.pptx
+++ b/assets/dambbukharu/pitch-deck-seed-v1.1.pptx
@@ -19569,7 +19569,7 @@
         <p:spPr>
           <a:xfrm>
             <a:off x="2487168" y="2212848"/>
-            <a:ext cx="4098341" cy="402336"/>
+            <a:ext cx="4644786" cy="402336"/>
           </a:xfrm>
           <a:prstGeom prst="roundRect">
             <a:avLst>
@@ -19596,7 +19596,7 @@
         <p:spPr>
           <a:xfrm>
             <a:off x="2487168" y="2212848"/>
-            <a:ext cx="4098341" cy="402336"/>
+            <a:ext cx="4644786" cy="402336"/>
           </a:xfrm>
           <a:prstGeom prst="rect">
             <a:avLst/>
@@ -19620,7 +19620,7 @@
                 <a:ea typeface="Pretendard" pitchFamily="34" charset="-122"/>
                 <a:cs typeface="Pretendard" pitchFamily="34" charset="-120"/>
               </a:rPr>
-              <a:t>김지창 45%</a:t>
+              <a:t>김지창 51%</a:t>
             </a:r>
             <a:endParaRPr lang="en-US" sz="1100" dirty="0"/>
           </a:p>
@@ -19634,8 +19634,8 @@
         </p:nvSpPr>
         <p:spPr>
           <a:xfrm>
-            <a:off x="6585509" y="2212848"/>
-            <a:ext cx="4098341" cy="402336"/>
+            <a:off x="7131954" y="2212848"/>
+            <a:ext cx="3551896" cy="402336"/>
           </a:xfrm>
           <a:prstGeom prst="roundRect">
             <a:avLst>
@@ -19661,8 +19661,8 @@
         </p:nvSpPr>
         <p:spPr>
           <a:xfrm>
-            <a:off x="6585509" y="2212848"/>
-            <a:ext cx="4098341" cy="402336"/>
+            <a:off x="7131954" y="2212848"/>
+            <a:ext cx="3551896" cy="402336"/>
           </a:xfrm>
           <a:prstGeom prst="rect">
             <a:avLst/>
@@ -19686,7 +19686,7 @@
                 <a:ea typeface="Pretendard" pitchFamily="34" charset="-122"/>
                 <a:cs typeface="Pretendard" pitchFamily="34" charset="-120"/>
               </a:rPr>
-              <a:t>공경섭 45%</a:t>
+              <a:t>공경섭 39%</a:t>
             </a:r>
             <a:endParaRPr lang="en-US" sz="1100" dirty="0"/>
           </a:p>
@@ -19806,7 +19806,7 @@
         <p:spPr>
           <a:xfrm>
             <a:off x="2487168" y="2871216"/>
-            <a:ext cx="3688507" cy="402336"/>
+            <a:ext cx="4180308" cy="402336"/>
           </a:xfrm>
           <a:prstGeom prst="roundRect">
             <a:avLst>
@@ -19833,7 +19833,7 @@
         <p:spPr>
           <a:xfrm>
             <a:off x="2487168" y="2871216"/>
-            <a:ext cx="3688507" cy="402336"/>
+            <a:ext cx="4180308" cy="402336"/>
           </a:xfrm>
           <a:prstGeom prst="rect">
             <a:avLst/>
@@ -19857,7 +19857,7 @@
                 <a:ea typeface="Pretendard" pitchFamily="34" charset="-122"/>
                 <a:cs typeface="Pretendard" pitchFamily="34" charset="-120"/>
               </a:rPr>
-              <a:t>김지창 40.5%</a:t>
+              <a:t>김지창 45.9%</a:t>
             </a:r>
             <a:endParaRPr lang="en-US" sz="1100" dirty="0"/>
           </a:p>
@@ -19871,8 +19871,8 @@
         </p:nvSpPr>
         <p:spPr>
           <a:xfrm>
-            <a:off x="6175675" y="2871216"/>
-            <a:ext cx="3688507" cy="402336"/>
+            <a:off x="6667476" y="2871216"/>
+            <a:ext cx="3196706" cy="402336"/>
           </a:xfrm>
           <a:prstGeom prst="roundRect">
             <a:avLst>
@@ -19898,8 +19898,8 @@
         </p:nvSpPr>
         <p:spPr>
           <a:xfrm>
-            <a:off x="6175675" y="2871216"/>
-            <a:ext cx="3688507" cy="402336"/>
+            <a:off x="6667476" y="2871216"/>
+            <a:ext cx="3196706" cy="402336"/>
           </a:xfrm>
           <a:prstGeom prst="rect">
             <a:avLst/>
@@ -19923,7 +19923,7 @@
                 <a:ea typeface="Pretendard" pitchFamily="34" charset="-122"/>
                 <a:cs typeface="Pretendard" pitchFamily="34" charset="-120"/>
               </a:rPr>
-              <a:t>공경섭 40.5%</a:t>
+              <a:t>공경섭 35.1%</a:t>
             </a:r>
             <a:endParaRPr lang="en-US" sz="1100" dirty="0"/>
           </a:p>
@@ -19937,7 +19937,7 @@
         </p:nvSpPr>
         <p:spPr>
           <a:xfrm>
-            <a:off x="9864181" y="2871216"/>
+            <a:off x="9864182" y="2871216"/>
             <a:ext cx="819668" cy="402336"/>
           </a:xfrm>
           <a:prstGeom prst="roundRect">
@@ -19964,7 +19964,7 @@
         </p:nvSpPr>
         <p:spPr>
           <a:xfrm>
-            <a:off x="9864181" y="2871216"/>
+            <a:off x="9864182" y="2871216"/>
             <a:ext cx="819668" cy="402336"/>
           </a:xfrm>
           <a:prstGeom prst="rect">
@@ -20514,7 +20514,7 @@
                           <a:ea typeface="Pretendard" pitchFamily="34" charset="-122"/>
                           <a:cs typeface="Pretendard" pitchFamily="34" charset="-120"/>
                         </a:rPr>
-                        <a:t>45%</a:t>
+                        <a:t>51%</a:t>
                       </a:r>
                       <a:endParaRPr lang="en-US" sz="1150" dirty="0">
                         <a:latin typeface="Pretendard" charset="0"/>
@@ -20579,7 +20579,7 @@
                           <a:ea typeface="Pretendard" pitchFamily="34" charset="-122"/>
                           <a:cs typeface="Pretendard" pitchFamily="34" charset="-120"/>
                         </a:rPr>
-                        <a:t>40.5%</a:t>
+                        <a:t>45.9%</a:t>
                       </a:r>
                       <a:endParaRPr lang="en-US" sz="1150" dirty="0">
                         <a:latin typeface="Pretendard" charset="0"/>
@@ -20779,7 +20779,7 @@
                           <a:ea typeface="Pretendard" pitchFamily="34" charset="-122"/>
                           <a:cs typeface="Pretendard" pitchFamily="34" charset="-120"/>
                         </a:rPr>
-                        <a:t>45%</a:t>
+                        <a:t>39%</a:t>
                       </a:r>
                       <a:endParaRPr lang="en-US" sz="1150" dirty="0">
                         <a:latin typeface="Pretendard" charset="0"/>
@@ -20844,7 +20844,7 @@
                           <a:ea typeface="Pretendard" pitchFamily="34" charset="-122"/>
                           <a:cs typeface="Pretendard" pitchFamily="34" charset="-120"/>
                         </a:rPr>
-                        <a:t>40.5%</a:t>
+                        <a:t>35.1%</a:t>
                       </a:r>
                       <a:endParaRPr lang="en-US" sz="1150" dirty="0">
                         <a:latin typeface="Pretendard" charset="0"/>
@@ -23334,7 +23334,7 @@
                 <a:ea typeface="Pretendard" pitchFamily="34" charset="-122"/>
                 <a:cs typeface="Pretendard" pitchFamily="34" charset="-120"/>
               </a:rPr>
-              <a:t>0–3개월</a:t>
+              <a:t>0–5개월</a:t>
             </a:r>
             <a:endParaRPr lang="en-US" sz="1050" dirty="0"/>
           </a:p>
